--- a/docs/content/final_project/final_project_activity.pptx
+++ b/docs/content/final_project/final_project_activity.pptx
@@ -3847,7 +3847,7 @@
             </a:pPr>
             <a:r>
               <a:rPr/>
-              <a:t>Going further</a:t>
+              <a:t>Extension — out of class (~30–40 min)</a:t>
             </a:r>
           </a:p>
         </p:txBody>
@@ -3867,12 +3867,12 @@
           <a:bodyPr/>
           <a:lstStyle/>
           <a:p>
-            <a:pPr lvl="0" indent="0" marL="1270000">
-              <a:buNone/>
-            </a:pPr>
-            <a:r>
-              <a:rPr sz="2000"/>
-              <a:t>Optional — do this if you finish early or want a stronger proposal.</a:t>
+            <a:pPr lvl="0" indent="0" marL="0">
+              <a:buNone/>
+            </a:pPr>
+            <a:r>
+              <a:rPr i="1"/>
+              <a:t>Turn this in with your worksheet. This is real project prep, not a throwaway exercise — a backup dataset and a road-tested question.</a:t>
             </a:r>
           </a:p>
           <a:p>
@@ -3884,7 +3884,7 @@
             </a:pPr>
             <a:r>
               <a:rPr b="1"/>
-              <a:t>Try a backup dataset</a:t>
+              <a:t>E1 · Try a backup dataset (do it)</a:t>
             </a:r>
           </a:p>
           <a:p>
@@ -3901,7 +3901,7 @@
             </a:r>
             <a:r>
               <a:rPr/>
-              <a:t> candidate. Having a backup means a dead-end dataset never sinks your project.</a:t>
+              <a:t> candidate dataset. Having a backup means a dead-end dataset never sinks your project.</a:t>
             </a:r>
           </a:p>
           <a:p>
@@ -4039,7 +4039,7 @@
             </a:pPr>
             <a:r>
               <a:rPr b="1"/>
-              <a:t>Pressure-test your question</a:t>
+              <a:t>E2 · Pressure-test your question ✍️ by hand</a:t>
             </a:r>
           </a:p>
           <a:p>
@@ -4358,7 +4358,7 @@
             </a:pPr>
             <a:r>
               <a:rPr i="1"/>
-              <a:t>End of Worksheet 08. Next: Lecture 09 — loading and cleaning your own dataset (Milestone 2).</a:t>
+              <a:t>End of the Final Project intro worksheet. Next: loading and cleaning your own dataset (Milestone 2).</a:t>
             </a:r>
           </a:p>
         </p:txBody>
@@ -4610,11 +4610,11 @@
             </a:r>
             <a:r>
               <a:rPr sz="2000" b="1"/>
-              <a:t>Going further</a:t>
+              <a:t>Extension</a:t>
             </a:r>
             <a:r>
               <a:rPr sz="2000"/>
-              <a:t> section is optional.</a:t>
+              <a:t> at the end is out-of-class project prep, turned in with the worksheet.</a:t>
             </a:r>
           </a:p>
           <a:p>
